--- a/PROIECT FINAL Postman.pptx
+++ b/PROIECT FINAL Postman.pptx
@@ -620,7 +620,7 @@
           <a:noFill/>
           <a:extLst>
             <a:ext uri="{909E8E84-426E-40dd-AFC4-6F175D3DCCD1}">
-              <a14:hiddenFill xmlns:a14="http://schemas.microsoft.com/office/drawing/2010/main" xmlns="">
+              <a14:hiddenFill xmlns="" xmlns:a14="http://schemas.microsoft.com/office/drawing/2010/main">
                 <a:solidFill>
                   <a:srgbClr val="FFFFFF"/>
                 </a:solidFill>
@@ -679,7 +679,7 @@
             </a:ln>
             <a:extLst>
               <a:ext uri="{91240B29-F687-4f45-9708-019B960494DF}">
-                <a14:hiddenLine xmlns:a14="http://schemas.microsoft.com/office/drawing/2010/main" xmlns="" w="9525">
+                <a14:hiddenLine xmlns="" xmlns:a14="http://schemas.microsoft.com/office/drawing/2010/main" w="9525">
                   <a:solidFill>
                     <a:srgbClr val="000000"/>
                   </a:solidFill>
@@ -769,7 +769,7 @@
             </a:ln>
             <a:extLst>
               <a:ext uri="{91240B29-F687-4f45-9708-019B960494DF}">
-                <a14:hiddenLine xmlns:a14="http://schemas.microsoft.com/office/drawing/2010/main" xmlns="" w="9525">
+                <a14:hiddenLine xmlns="" xmlns:a14="http://schemas.microsoft.com/office/drawing/2010/main" w="9525">
                   <a:solidFill>
                     <a:srgbClr val="000000"/>
                   </a:solidFill>
@@ -859,7 +859,7 @@
             </a:ln>
             <a:extLst>
               <a:ext uri="{91240B29-F687-4f45-9708-019B960494DF}">
-                <a14:hiddenLine xmlns:a14="http://schemas.microsoft.com/office/drawing/2010/main" xmlns="" w="9525">
+                <a14:hiddenLine xmlns="" xmlns:a14="http://schemas.microsoft.com/office/drawing/2010/main" w="9525">
                   <a:solidFill>
                     <a:srgbClr val="000000"/>
                   </a:solidFill>
@@ -893,7 +893,7 @@
             </a:ln>
             <a:extLst>
               <a:ext uri="{91240B29-F687-4f45-9708-019B960494DF}">
-                <a14:hiddenLine xmlns:a14="http://schemas.microsoft.com/office/drawing/2010/main" xmlns="" w="9525">
+                <a14:hiddenLine xmlns="" xmlns:a14="http://schemas.microsoft.com/office/drawing/2010/main" w="9525">
                   <a:solidFill>
                     <a:srgbClr val="000000"/>
                   </a:solidFill>
@@ -983,7 +983,7 @@
             </a:ln>
             <a:extLst>
               <a:ext uri="{91240B29-F687-4f45-9708-019B960494DF}">
-                <a14:hiddenLine xmlns:a14="http://schemas.microsoft.com/office/drawing/2010/main" xmlns="" w="9525">
+                <a14:hiddenLine xmlns="" xmlns:a14="http://schemas.microsoft.com/office/drawing/2010/main" w="9525">
                   <a:solidFill>
                     <a:srgbClr val="000000"/>
                   </a:solidFill>
@@ -1045,7 +1045,7 @@
             </a:ln>
             <a:extLst>
               <a:ext uri="{91240B29-F687-4f45-9708-019B960494DF}">
-                <a14:hiddenLine xmlns:a14="http://schemas.microsoft.com/office/drawing/2010/main" xmlns="" w="9525">
+                <a14:hiddenLine xmlns="" xmlns:a14="http://schemas.microsoft.com/office/drawing/2010/main" w="9525">
                   <a:solidFill>
                     <a:srgbClr val="000000"/>
                   </a:solidFill>
@@ -1107,7 +1107,7 @@
             </a:ln>
             <a:extLst>
               <a:ext uri="{91240B29-F687-4f45-9708-019B960494DF}">
-                <a14:hiddenLine xmlns:a14="http://schemas.microsoft.com/office/drawing/2010/main" xmlns="" w="9525">
+                <a14:hiddenLine xmlns="" xmlns:a14="http://schemas.microsoft.com/office/drawing/2010/main" w="9525">
                   <a:solidFill>
                     <a:srgbClr val="000000"/>
                   </a:solidFill>
@@ -1197,7 +1197,7 @@
             </a:ln>
             <a:extLst>
               <a:ext uri="{91240B29-F687-4f45-9708-019B960494DF}">
-                <a14:hiddenLine xmlns:a14="http://schemas.microsoft.com/office/drawing/2010/main" xmlns="" w="9525">
+                <a14:hiddenLine xmlns="" xmlns:a14="http://schemas.microsoft.com/office/drawing/2010/main" w="9525">
                   <a:solidFill>
                     <a:srgbClr val="000000"/>
                   </a:solidFill>
@@ -1259,7 +1259,7 @@
             </a:ln>
             <a:extLst>
               <a:ext uri="{91240B29-F687-4f45-9708-019B960494DF}">
-                <a14:hiddenLine xmlns:a14="http://schemas.microsoft.com/office/drawing/2010/main" xmlns="" w="9525">
+                <a14:hiddenLine xmlns="" xmlns:a14="http://schemas.microsoft.com/office/drawing/2010/main" w="9525">
                   <a:solidFill>
                     <a:srgbClr val="000000"/>
                   </a:solidFill>
@@ -1321,7 +1321,7 @@
             </a:ln>
             <a:extLst>
               <a:ext uri="{91240B29-F687-4f45-9708-019B960494DF}">
-                <a14:hiddenLine xmlns:a14="http://schemas.microsoft.com/office/drawing/2010/main" xmlns="" w="9525">
+                <a14:hiddenLine xmlns="" xmlns:a14="http://schemas.microsoft.com/office/drawing/2010/main" w="9525">
                   <a:solidFill>
                     <a:srgbClr val="000000"/>
                   </a:solidFill>
@@ -1411,7 +1411,7 @@
             </a:ln>
             <a:extLst>
               <a:ext uri="{91240B29-F687-4f45-9708-019B960494DF}">
-                <a14:hiddenLine xmlns:a14="http://schemas.microsoft.com/office/drawing/2010/main" xmlns="" w="9525">
+                <a14:hiddenLine xmlns="" xmlns:a14="http://schemas.microsoft.com/office/drawing/2010/main" w="9525">
                   <a:solidFill>
                     <a:srgbClr val="000000"/>
                   </a:solidFill>
@@ -1501,7 +1501,7 @@
             </a:ln>
             <a:extLst>
               <a:ext uri="{91240B29-F687-4f45-9708-019B960494DF}">
-                <a14:hiddenLine xmlns:a14="http://schemas.microsoft.com/office/drawing/2010/main" xmlns="" w="9525">
+                <a14:hiddenLine xmlns="" xmlns:a14="http://schemas.microsoft.com/office/drawing/2010/main" w="9525">
                   <a:solidFill>
                     <a:srgbClr val="000000"/>
                   </a:solidFill>
@@ -1563,7 +1563,7 @@
             </a:ln>
             <a:extLst>
               <a:ext uri="{91240B29-F687-4f45-9708-019B960494DF}">
-                <a14:hiddenLine xmlns:a14="http://schemas.microsoft.com/office/drawing/2010/main" xmlns="" w="9525">
+                <a14:hiddenLine xmlns="" xmlns:a14="http://schemas.microsoft.com/office/drawing/2010/main" w="9525">
                   <a:solidFill>
                     <a:srgbClr val="000000"/>
                   </a:solidFill>
@@ -1673,7 +1673,7 @@
             </a:ln>
             <a:extLst>
               <a:ext uri="{91240B29-F687-4f45-9708-019B960494DF}">
-                <a14:hiddenLine xmlns:a14="http://schemas.microsoft.com/office/drawing/2010/main" xmlns="" w="9525">
+                <a14:hiddenLine xmlns="" xmlns:a14="http://schemas.microsoft.com/office/drawing/2010/main" w="9525">
                   <a:solidFill>
                     <a:srgbClr val="000000"/>
                   </a:solidFill>
@@ -1735,7 +1735,7 @@
             </a:ln>
             <a:extLst>
               <a:ext uri="{91240B29-F687-4f45-9708-019B960494DF}">
-                <a14:hiddenLine xmlns:a14="http://schemas.microsoft.com/office/drawing/2010/main" xmlns="" w="9525">
+                <a14:hiddenLine xmlns="" xmlns:a14="http://schemas.microsoft.com/office/drawing/2010/main" w="9525">
                   <a:solidFill>
                     <a:srgbClr val="000000"/>
                   </a:solidFill>
@@ -1825,7 +1825,7 @@
             </a:ln>
             <a:extLst>
               <a:ext uri="{91240B29-F687-4f45-9708-019B960494DF}">
-                <a14:hiddenLine xmlns:a14="http://schemas.microsoft.com/office/drawing/2010/main" xmlns="" w="9525">
+                <a14:hiddenLine xmlns="" xmlns:a14="http://schemas.microsoft.com/office/drawing/2010/main" w="9525">
                   <a:solidFill>
                     <a:srgbClr val="000000"/>
                   </a:solidFill>
@@ -1915,7 +1915,7 @@
             </a:ln>
             <a:extLst>
               <a:ext uri="{91240B29-F687-4f45-9708-019B960494DF}">
-                <a14:hiddenLine xmlns:a14="http://schemas.microsoft.com/office/drawing/2010/main" xmlns="" w="9525">
+                <a14:hiddenLine xmlns="" xmlns:a14="http://schemas.microsoft.com/office/drawing/2010/main" w="9525">
                   <a:solidFill>
                     <a:srgbClr val="000000"/>
                   </a:solidFill>
@@ -1977,7 +1977,7 @@
             </a:ln>
             <a:extLst>
               <a:ext uri="{91240B29-F687-4f45-9708-019B960494DF}">
-                <a14:hiddenLine xmlns:a14="http://schemas.microsoft.com/office/drawing/2010/main" xmlns="" w="9525">
+                <a14:hiddenLine xmlns="" xmlns:a14="http://schemas.microsoft.com/office/drawing/2010/main" w="9525">
                   <a:solidFill>
                     <a:srgbClr val="000000"/>
                   </a:solidFill>
@@ -2067,7 +2067,7 @@
             </a:ln>
             <a:extLst>
               <a:ext uri="{91240B29-F687-4f45-9708-019B960494DF}">
-                <a14:hiddenLine xmlns:a14="http://schemas.microsoft.com/office/drawing/2010/main" xmlns="" w="9525">
+                <a14:hiddenLine xmlns="" xmlns:a14="http://schemas.microsoft.com/office/drawing/2010/main" w="9525">
                   <a:solidFill>
                     <a:srgbClr val="000000"/>
                   </a:solidFill>
@@ -2157,7 +2157,7 @@
             </a:ln>
             <a:extLst>
               <a:ext uri="{91240B29-F687-4f45-9708-019B960494DF}">
-                <a14:hiddenLine xmlns:a14="http://schemas.microsoft.com/office/drawing/2010/main" xmlns="" w="9525">
+                <a14:hiddenLine xmlns="" xmlns:a14="http://schemas.microsoft.com/office/drawing/2010/main" w="9525">
                   <a:solidFill>
                     <a:srgbClr val="000000"/>
                   </a:solidFill>
@@ -2213,7 +2213,7 @@
             </a:ln>
             <a:extLst>
               <a:ext uri="{91240B29-F687-4f45-9708-019B960494DF}">
-                <a14:hiddenLine xmlns:a14="http://schemas.microsoft.com/office/drawing/2010/main" xmlns="" w="9525">
+                <a14:hiddenLine xmlns="" xmlns:a14="http://schemas.microsoft.com/office/drawing/2010/main" w="9525">
                   <a:solidFill>
                     <a:srgbClr val="000000"/>
                   </a:solidFill>
@@ -2303,7 +2303,7 @@
             </a:ln>
             <a:extLst>
               <a:ext uri="{91240B29-F687-4f45-9708-019B960494DF}">
-                <a14:hiddenLine xmlns:a14="http://schemas.microsoft.com/office/drawing/2010/main" xmlns="" w="9525">
+                <a14:hiddenLine xmlns="" xmlns:a14="http://schemas.microsoft.com/office/drawing/2010/main" w="9525">
                   <a:solidFill>
                     <a:srgbClr val="000000"/>
                   </a:solidFill>
@@ -2359,7 +2359,7 @@
             </a:ln>
             <a:extLst>
               <a:ext uri="{91240B29-F687-4f45-9708-019B960494DF}">
-                <a14:hiddenLine xmlns:a14="http://schemas.microsoft.com/office/drawing/2010/main" xmlns="" w="9525">
+                <a14:hiddenLine xmlns="" xmlns:a14="http://schemas.microsoft.com/office/drawing/2010/main" w="9525">
                   <a:solidFill>
                     <a:srgbClr val="000000"/>
                   </a:solidFill>
@@ -2449,7 +2449,7 @@
             </a:ln>
             <a:extLst>
               <a:ext uri="{91240B29-F687-4f45-9708-019B960494DF}">
-                <a14:hiddenLine xmlns:a14="http://schemas.microsoft.com/office/drawing/2010/main" xmlns="" w="9525">
+                <a14:hiddenLine xmlns="" xmlns:a14="http://schemas.microsoft.com/office/drawing/2010/main" w="9525">
                   <a:solidFill>
                     <a:srgbClr val="000000"/>
                   </a:solidFill>
@@ -2517,7 +2517,7 @@
             </a:ln>
             <a:extLst>
               <a:ext uri="{91240B29-F687-4f45-9708-019B960494DF}">
-                <a14:hiddenLine xmlns:a14="http://schemas.microsoft.com/office/drawing/2010/main" xmlns="" w="9525">
+                <a14:hiddenLine xmlns="" xmlns:a14="http://schemas.microsoft.com/office/drawing/2010/main" w="9525">
                   <a:solidFill>
                     <a:srgbClr val="000000"/>
                   </a:solidFill>
@@ -2607,7 +2607,7 @@
             </a:ln>
             <a:extLst>
               <a:ext uri="{91240B29-F687-4f45-9708-019B960494DF}">
-                <a14:hiddenLine xmlns:a14="http://schemas.microsoft.com/office/drawing/2010/main" xmlns="" w="9525">
+                <a14:hiddenLine xmlns="" xmlns:a14="http://schemas.microsoft.com/office/drawing/2010/main" w="9525">
                   <a:solidFill>
                     <a:srgbClr val="000000"/>
                   </a:solidFill>
@@ -2675,7 +2675,7 @@
             </a:ln>
             <a:extLst>
               <a:ext uri="{91240B29-F687-4f45-9708-019B960494DF}">
-                <a14:hiddenLine xmlns:a14="http://schemas.microsoft.com/office/drawing/2010/main" xmlns="" w="9525">
+                <a14:hiddenLine xmlns="" xmlns:a14="http://schemas.microsoft.com/office/drawing/2010/main" w="9525">
                   <a:solidFill>
                     <a:srgbClr val="000000"/>
                   </a:solidFill>
@@ -2765,7 +2765,7 @@
             </a:ln>
             <a:extLst>
               <a:ext uri="{91240B29-F687-4f45-9708-019B960494DF}">
-                <a14:hiddenLine xmlns:a14="http://schemas.microsoft.com/office/drawing/2010/main" xmlns="" w="9525">
+                <a14:hiddenLine xmlns="" xmlns:a14="http://schemas.microsoft.com/office/drawing/2010/main" w="9525">
                   <a:solidFill>
                     <a:srgbClr val="000000"/>
                   </a:solidFill>
@@ -2799,7 +2799,7 @@
             </a:ln>
             <a:extLst>
               <a:ext uri="{91240B29-F687-4f45-9708-019B960494DF}">
-                <a14:hiddenLine xmlns:a14="http://schemas.microsoft.com/office/drawing/2010/main" xmlns="" w="9525">
+                <a14:hiddenLine xmlns="" xmlns:a14="http://schemas.microsoft.com/office/drawing/2010/main" w="9525">
                   <a:solidFill>
                     <a:srgbClr val="000000"/>
                   </a:solidFill>
@@ -2889,7 +2889,7 @@
             </a:ln>
             <a:extLst>
               <a:ext uri="{91240B29-F687-4f45-9708-019B960494DF}">
-                <a14:hiddenLine xmlns:a14="http://schemas.microsoft.com/office/drawing/2010/main" xmlns="" w="9525">
+                <a14:hiddenLine xmlns="" xmlns:a14="http://schemas.microsoft.com/office/drawing/2010/main" w="9525">
                   <a:solidFill>
                     <a:srgbClr val="000000"/>
                   </a:solidFill>
@@ -2951,7 +2951,7 @@
             </a:ln>
             <a:extLst>
               <a:ext uri="{91240B29-F687-4f45-9708-019B960494DF}">
-                <a14:hiddenLine xmlns:a14="http://schemas.microsoft.com/office/drawing/2010/main" xmlns="" w="9525">
+                <a14:hiddenLine xmlns="" xmlns:a14="http://schemas.microsoft.com/office/drawing/2010/main" w="9525">
                   <a:solidFill>
                     <a:srgbClr val="000000"/>
                   </a:solidFill>
@@ -3013,7 +3013,7 @@
             </a:ln>
             <a:extLst>
               <a:ext uri="{91240B29-F687-4f45-9708-019B960494DF}">
-                <a14:hiddenLine xmlns:a14="http://schemas.microsoft.com/office/drawing/2010/main" xmlns="" w="9525">
+                <a14:hiddenLine xmlns="" xmlns:a14="http://schemas.microsoft.com/office/drawing/2010/main" w="9525">
                   <a:solidFill>
                     <a:srgbClr val="000000"/>
                   </a:solidFill>
@@ -3103,7 +3103,7 @@
             </a:ln>
             <a:extLst>
               <a:ext uri="{91240B29-F687-4f45-9708-019B960494DF}">
-                <a14:hiddenLine xmlns:a14="http://schemas.microsoft.com/office/drawing/2010/main" xmlns="" w="9525">
+                <a14:hiddenLine xmlns="" xmlns:a14="http://schemas.microsoft.com/office/drawing/2010/main" w="9525">
                   <a:solidFill>
                     <a:srgbClr val="000000"/>
                   </a:solidFill>
@@ -3171,7 +3171,7 @@
             </a:ln>
             <a:extLst>
               <a:ext uri="{91240B29-F687-4f45-9708-019B960494DF}">
-                <a14:hiddenLine xmlns:a14="http://schemas.microsoft.com/office/drawing/2010/main" xmlns="" w="9525">
+                <a14:hiddenLine xmlns="" xmlns:a14="http://schemas.microsoft.com/office/drawing/2010/main" w="9525">
                   <a:solidFill>
                     <a:srgbClr val="000000"/>
                   </a:solidFill>
@@ -3233,7 +3233,7 @@
             </a:ln>
             <a:extLst>
               <a:ext uri="{91240B29-F687-4f45-9708-019B960494DF}">
-                <a14:hiddenLine xmlns:a14="http://schemas.microsoft.com/office/drawing/2010/main" xmlns="" w="9525">
+                <a14:hiddenLine xmlns="" xmlns:a14="http://schemas.microsoft.com/office/drawing/2010/main" w="9525">
                   <a:solidFill>
                     <a:srgbClr val="000000"/>
                   </a:solidFill>
@@ -3323,7 +3323,7 @@
             </a:ln>
             <a:extLst>
               <a:ext uri="{91240B29-F687-4f45-9708-019B960494DF}">
-                <a14:hiddenLine xmlns:a14="http://schemas.microsoft.com/office/drawing/2010/main" xmlns="" w="9525">
+                <a14:hiddenLine xmlns="" xmlns:a14="http://schemas.microsoft.com/office/drawing/2010/main" w="9525">
                   <a:solidFill>
                     <a:srgbClr val="000000"/>
                   </a:solidFill>
@@ -3385,7 +3385,7 @@
             </a:ln>
             <a:extLst>
               <a:ext uri="{91240B29-F687-4f45-9708-019B960494DF}">
-                <a14:hiddenLine xmlns:a14="http://schemas.microsoft.com/office/drawing/2010/main" xmlns="" w="9525">
+                <a14:hiddenLine xmlns="" xmlns:a14="http://schemas.microsoft.com/office/drawing/2010/main" w="9525">
                   <a:solidFill>
                     <a:srgbClr val="000000"/>
                   </a:solidFill>
@@ -3475,7 +3475,7 @@
             </a:ln>
             <a:extLst>
               <a:ext uri="{91240B29-F687-4f45-9708-019B960494DF}">
-                <a14:hiddenLine xmlns:a14="http://schemas.microsoft.com/office/drawing/2010/main" xmlns="" w="9525">
+                <a14:hiddenLine xmlns="" xmlns:a14="http://schemas.microsoft.com/office/drawing/2010/main" w="9525">
                   <a:solidFill>
                     <a:srgbClr val="000000"/>
                   </a:solidFill>
@@ -3537,7 +3537,7 @@
             </a:ln>
             <a:extLst>
               <a:ext uri="{91240B29-F687-4f45-9708-019B960494DF}">
-                <a14:hiddenLine xmlns:a14="http://schemas.microsoft.com/office/drawing/2010/main" xmlns="" w="9525">
+                <a14:hiddenLine xmlns="" xmlns:a14="http://schemas.microsoft.com/office/drawing/2010/main" w="9525">
                   <a:solidFill>
                     <a:srgbClr val="000000"/>
                   </a:solidFill>
@@ -3627,7 +3627,7 @@
             </a:ln>
             <a:extLst>
               <a:ext uri="{91240B29-F687-4f45-9708-019B960494DF}">
-                <a14:hiddenLine xmlns:a14="http://schemas.microsoft.com/office/drawing/2010/main" xmlns="" w="9525">
+                <a14:hiddenLine xmlns="" xmlns:a14="http://schemas.microsoft.com/office/drawing/2010/main" w="9525">
                   <a:solidFill>
                     <a:srgbClr val="000000"/>
                   </a:solidFill>
@@ -3661,7 +3661,7 @@
             </a:ln>
             <a:extLst>
               <a:ext uri="{91240B29-F687-4f45-9708-019B960494DF}">
-                <a14:hiddenLine xmlns:a14="http://schemas.microsoft.com/office/drawing/2010/main" xmlns="" w="9525">
+                <a14:hiddenLine xmlns="" xmlns:a14="http://schemas.microsoft.com/office/drawing/2010/main" w="9525">
                   <a:solidFill>
                     <a:srgbClr val="000000"/>
                   </a:solidFill>
@@ -3726,7 +3726,7 @@
             </a:ln>
             <a:extLst>
               <a:ext uri="{91240B29-F687-4f45-9708-019B960494DF}">
-                <a14:hiddenLine xmlns:a14="http://schemas.microsoft.com/office/drawing/2010/main" xmlns="" w="9525">
+                <a14:hiddenLine xmlns="" xmlns:a14="http://schemas.microsoft.com/office/drawing/2010/main" w="9525">
                   <a:solidFill>
                     <a:srgbClr val="000000"/>
                   </a:solidFill>
@@ -3816,7 +3816,7 @@
             </a:ln>
             <a:extLst>
               <a:ext uri="{91240B29-F687-4f45-9708-019B960494DF}">
-                <a14:hiddenLine xmlns:a14="http://schemas.microsoft.com/office/drawing/2010/main" xmlns="" w="9525">
+                <a14:hiddenLine xmlns="" xmlns:a14="http://schemas.microsoft.com/office/drawing/2010/main" w="9525">
                   <a:solidFill>
                     <a:srgbClr val="000000"/>
                   </a:solidFill>
@@ -3878,7 +3878,7 @@
             </a:ln>
             <a:extLst>
               <a:ext uri="{91240B29-F687-4f45-9708-019B960494DF}">
-                <a14:hiddenLine xmlns:a14="http://schemas.microsoft.com/office/drawing/2010/main" xmlns="" w="9525">
+                <a14:hiddenLine xmlns="" xmlns:a14="http://schemas.microsoft.com/office/drawing/2010/main" w="9525">
                   <a:solidFill>
                     <a:srgbClr val="000000"/>
                   </a:solidFill>
@@ -3968,7 +3968,7 @@
             </a:ln>
             <a:extLst>
               <a:ext uri="{91240B29-F687-4f45-9708-019B960494DF}">
-                <a14:hiddenLine xmlns:a14="http://schemas.microsoft.com/office/drawing/2010/main" xmlns="" w="9525">
+                <a14:hiddenLine xmlns="" xmlns:a14="http://schemas.microsoft.com/office/drawing/2010/main" w="9525">
                   <a:solidFill>
                     <a:srgbClr val="000000"/>
                   </a:solidFill>
@@ -4058,7 +4058,7 @@
             </a:ln>
             <a:extLst>
               <a:ext uri="{91240B29-F687-4f45-9708-019B960494DF}">
-                <a14:hiddenLine xmlns:a14="http://schemas.microsoft.com/office/drawing/2010/main" xmlns="" w="9525">
+                <a14:hiddenLine xmlns="" xmlns:a14="http://schemas.microsoft.com/office/drawing/2010/main" w="9525">
                   <a:solidFill>
                     <a:srgbClr val="000000"/>
                   </a:solidFill>
@@ -4123,7 +4123,7 @@
             </a:ln>
             <a:extLst>
               <a:ext uri="{91240B29-F687-4f45-9708-019B960494DF}">
-                <a14:hiddenLine xmlns:a14="http://schemas.microsoft.com/office/drawing/2010/main" xmlns="" w="9525">
+                <a14:hiddenLine xmlns="" xmlns:a14="http://schemas.microsoft.com/office/drawing/2010/main" w="9525">
                   <a:solidFill>
                     <a:srgbClr val="000000"/>
                   </a:solidFill>
@@ -4185,7 +4185,7 @@
             </a:ln>
             <a:extLst>
               <a:ext uri="{91240B29-F687-4f45-9708-019B960494DF}">
-                <a14:hiddenLine xmlns:a14="http://schemas.microsoft.com/office/drawing/2010/main" xmlns="" w="9525">
+                <a14:hiddenLine xmlns="" xmlns:a14="http://schemas.microsoft.com/office/drawing/2010/main" w="9525">
                   <a:solidFill>
                     <a:srgbClr val="000000"/>
                   </a:solidFill>
@@ -4275,7 +4275,7 @@
             </a:ln>
             <a:extLst>
               <a:ext uri="{91240B29-F687-4f45-9708-019B960494DF}">
-                <a14:hiddenLine xmlns:a14="http://schemas.microsoft.com/office/drawing/2010/main" xmlns="" w="9525">
+                <a14:hiddenLine xmlns="" xmlns:a14="http://schemas.microsoft.com/office/drawing/2010/main" w="9525">
                   <a:solidFill>
                     <a:srgbClr val="000000"/>
                   </a:solidFill>
@@ -4365,7 +4365,7 @@
             </a:ln>
             <a:extLst>
               <a:ext uri="{91240B29-F687-4f45-9708-019B960494DF}">
-                <a14:hiddenLine xmlns:a14="http://schemas.microsoft.com/office/drawing/2010/main" xmlns="" w="9525">
+                <a14:hiddenLine xmlns="" xmlns:a14="http://schemas.microsoft.com/office/drawing/2010/main" w="9525">
                   <a:solidFill>
                     <a:srgbClr val="000000"/>
                   </a:solidFill>
@@ -4427,7 +4427,7 @@
             </a:ln>
             <a:extLst>
               <a:ext uri="{91240B29-F687-4f45-9708-019B960494DF}">
-                <a14:hiddenLine xmlns:a14="http://schemas.microsoft.com/office/drawing/2010/main" xmlns="" w="9525">
+                <a14:hiddenLine xmlns="" xmlns:a14="http://schemas.microsoft.com/office/drawing/2010/main" w="9525">
                   <a:solidFill>
                     <a:srgbClr val="000000"/>
                   </a:solidFill>
@@ -4547,7 +4547,7 @@
             </a:ln>
             <a:extLst>
               <a:ext uri="{91240B29-F687-4f45-9708-019B960494DF}">
-                <a14:hiddenLine xmlns:a14="http://schemas.microsoft.com/office/drawing/2010/main" xmlns="" w="9525">
+                <a14:hiddenLine xmlns="" xmlns:a14="http://schemas.microsoft.com/office/drawing/2010/main" w="9525">
                   <a:solidFill>
                     <a:srgbClr val="000000"/>
                   </a:solidFill>
@@ -4615,7 +4615,7 @@
             </a:ln>
             <a:extLst>
               <a:ext uri="{91240B29-F687-4f45-9708-019B960494DF}">
-                <a14:hiddenLine xmlns:a14="http://schemas.microsoft.com/office/drawing/2010/main" xmlns="" w="9525">
+                <a14:hiddenLine xmlns="" xmlns:a14="http://schemas.microsoft.com/office/drawing/2010/main" w="9525">
                   <a:solidFill>
                     <a:srgbClr val="000000"/>
                   </a:solidFill>
@@ -4705,7 +4705,7 @@
             </a:ln>
             <a:extLst>
               <a:ext uri="{91240B29-F687-4f45-9708-019B960494DF}">
-                <a14:hiddenLine xmlns:a14="http://schemas.microsoft.com/office/drawing/2010/main" xmlns="" w="9525">
+                <a14:hiddenLine xmlns="" xmlns:a14="http://schemas.microsoft.com/office/drawing/2010/main" w="9525">
                   <a:solidFill>
                     <a:srgbClr val="000000"/>
                   </a:solidFill>
@@ -9434,7 +9434,7 @@
           <a:noFill/>
           <a:extLst>
             <a:ext uri="{909E8E84-426E-40dd-AFC4-6F175D3DCCD1}">
-              <a14:hiddenFill xmlns:a14="http://schemas.microsoft.com/office/drawing/2010/main" xmlns="">
+              <a14:hiddenFill xmlns="" xmlns:a14="http://schemas.microsoft.com/office/drawing/2010/main">
                 <a:solidFill>
                   <a:srgbClr val="FFFFFF"/>
                 </a:solidFill>
@@ -9508,7 +9508,7 @@
               </a:ln>
               <a:extLst>
                 <a:ext uri="{91240B29-F687-4f45-9708-019B960494DF}">
-                  <a14:hiddenLine xmlns:a14="http://schemas.microsoft.com/office/drawing/2010/main" xmlns="" w="9525">
+                  <a14:hiddenLine xmlns="" xmlns:a14="http://schemas.microsoft.com/office/drawing/2010/main" w="9525">
                     <a:solidFill>
                       <a:srgbClr val="000000"/>
                     </a:solidFill>
@@ -9598,7 +9598,7 @@
               </a:ln>
               <a:extLst>
                 <a:ext uri="{91240B29-F687-4f45-9708-019B960494DF}">
-                  <a14:hiddenLine xmlns:a14="http://schemas.microsoft.com/office/drawing/2010/main" xmlns="" w="9525">
+                  <a14:hiddenLine xmlns="" xmlns:a14="http://schemas.microsoft.com/office/drawing/2010/main" w="9525">
                     <a:solidFill>
                       <a:srgbClr val="000000"/>
                     </a:solidFill>
@@ -9688,7 +9688,7 @@
               </a:ln>
               <a:extLst>
                 <a:ext uri="{91240B29-F687-4f45-9708-019B960494DF}">
-                  <a14:hiddenLine xmlns:a14="http://schemas.microsoft.com/office/drawing/2010/main" xmlns="" w="9525">
+                  <a14:hiddenLine xmlns="" xmlns:a14="http://schemas.microsoft.com/office/drawing/2010/main" w="9525">
                     <a:solidFill>
                       <a:srgbClr val="000000"/>
                     </a:solidFill>
@@ -9750,7 +9750,7 @@
               </a:ln>
               <a:extLst>
                 <a:ext uri="{91240B29-F687-4f45-9708-019B960494DF}">
-                  <a14:hiddenLine xmlns:a14="http://schemas.microsoft.com/office/drawing/2010/main" xmlns="" w="9525">
+                  <a14:hiddenLine xmlns="" xmlns:a14="http://schemas.microsoft.com/office/drawing/2010/main" w="9525">
                     <a:solidFill>
                       <a:srgbClr val="000000"/>
                     </a:solidFill>
@@ -9840,7 +9840,7 @@
               </a:ln>
               <a:extLst>
                 <a:ext uri="{91240B29-F687-4f45-9708-019B960494DF}">
-                  <a14:hiddenLine xmlns:a14="http://schemas.microsoft.com/office/drawing/2010/main" xmlns="" w="9525">
+                  <a14:hiddenLine xmlns="" xmlns:a14="http://schemas.microsoft.com/office/drawing/2010/main" w="9525">
                     <a:solidFill>
                       <a:srgbClr val="000000"/>
                     </a:solidFill>
@@ -9902,7 +9902,7 @@
               </a:ln>
               <a:extLst>
                 <a:ext uri="{91240B29-F687-4f45-9708-019B960494DF}">
-                  <a14:hiddenLine xmlns:a14="http://schemas.microsoft.com/office/drawing/2010/main" xmlns="" w="9525">
+                  <a14:hiddenLine xmlns="" xmlns:a14="http://schemas.microsoft.com/office/drawing/2010/main" w="9525">
                     <a:solidFill>
                       <a:srgbClr val="000000"/>
                     </a:solidFill>
@@ -9964,7 +9964,7 @@
               </a:ln>
               <a:extLst>
                 <a:ext uri="{91240B29-F687-4f45-9708-019B960494DF}">
-                  <a14:hiddenLine xmlns:a14="http://schemas.microsoft.com/office/drawing/2010/main" xmlns="" w="9525">
+                  <a14:hiddenLine xmlns="" xmlns:a14="http://schemas.microsoft.com/office/drawing/2010/main" w="9525">
                     <a:solidFill>
                       <a:srgbClr val="000000"/>
                     </a:solidFill>
@@ -10054,7 +10054,7 @@
               </a:ln>
               <a:extLst>
                 <a:ext uri="{91240B29-F687-4f45-9708-019B960494DF}">
-                  <a14:hiddenLine xmlns:a14="http://schemas.microsoft.com/office/drawing/2010/main" xmlns="" w="9525">
+                  <a14:hiddenLine xmlns="" xmlns:a14="http://schemas.microsoft.com/office/drawing/2010/main" w="9525">
                     <a:solidFill>
                       <a:srgbClr val="000000"/>
                     </a:solidFill>
@@ -10144,7 +10144,7 @@
               </a:ln>
               <a:extLst>
                 <a:ext uri="{91240B29-F687-4f45-9708-019B960494DF}">
-                  <a14:hiddenLine xmlns:a14="http://schemas.microsoft.com/office/drawing/2010/main" xmlns="" w="9525">
+                  <a14:hiddenLine xmlns="" xmlns:a14="http://schemas.microsoft.com/office/drawing/2010/main" w="9525">
                     <a:solidFill>
                       <a:srgbClr val="000000"/>
                     </a:solidFill>
@@ -10206,7 +10206,7 @@
               </a:ln>
               <a:extLst>
                 <a:ext uri="{91240B29-F687-4f45-9708-019B960494DF}">
-                  <a14:hiddenLine xmlns:a14="http://schemas.microsoft.com/office/drawing/2010/main" xmlns="" w="9525">
+                  <a14:hiddenLine xmlns="" xmlns:a14="http://schemas.microsoft.com/office/drawing/2010/main" w="9525">
                     <a:solidFill>
                       <a:srgbClr val="000000"/>
                     </a:solidFill>
@@ -10316,7 +10316,7 @@
               </a:ln>
               <a:extLst>
                 <a:ext uri="{91240B29-F687-4f45-9708-019B960494DF}">
-                  <a14:hiddenLine xmlns:a14="http://schemas.microsoft.com/office/drawing/2010/main" xmlns="" w="9525">
+                  <a14:hiddenLine xmlns="" xmlns:a14="http://schemas.microsoft.com/office/drawing/2010/main" w="9525">
                     <a:solidFill>
                       <a:srgbClr val="000000"/>
                     </a:solidFill>
@@ -10400,7 +10400,7 @@
               </a:ln>
               <a:extLst>
                 <a:ext uri="{91240B29-F687-4f45-9708-019B960494DF}">
-                  <a14:hiddenLine xmlns:a14="http://schemas.microsoft.com/office/drawing/2010/main" xmlns="" w="9525">
+                  <a14:hiddenLine xmlns="" xmlns:a14="http://schemas.microsoft.com/office/drawing/2010/main" w="9525">
                     <a:solidFill>
                       <a:srgbClr val="000000"/>
                     </a:solidFill>
@@ -10462,7 +10462,7 @@
               </a:ln>
               <a:extLst>
                 <a:ext uri="{91240B29-F687-4f45-9708-019B960494DF}">
-                  <a14:hiddenLine xmlns:a14="http://schemas.microsoft.com/office/drawing/2010/main" xmlns="" w="9525">
+                  <a14:hiddenLine xmlns="" xmlns:a14="http://schemas.microsoft.com/office/drawing/2010/main" w="9525">
                     <a:solidFill>
                       <a:srgbClr val="000000"/>
                     </a:solidFill>
@@ -10524,7 +10524,7 @@
               </a:ln>
               <a:extLst>
                 <a:ext uri="{91240B29-F687-4f45-9708-019B960494DF}">
-                  <a14:hiddenLine xmlns:a14="http://schemas.microsoft.com/office/drawing/2010/main" xmlns="" w="9525">
+                  <a14:hiddenLine xmlns="" xmlns:a14="http://schemas.microsoft.com/office/drawing/2010/main" w="9525">
                     <a:solidFill>
                       <a:srgbClr val="000000"/>
                     </a:solidFill>
@@ -10614,7 +10614,7 @@
               </a:ln>
               <a:extLst>
                 <a:ext uri="{91240B29-F687-4f45-9708-019B960494DF}">
-                  <a14:hiddenLine xmlns:a14="http://schemas.microsoft.com/office/drawing/2010/main" xmlns="" w="9525">
+                  <a14:hiddenLine xmlns="" xmlns:a14="http://schemas.microsoft.com/office/drawing/2010/main" w="9525">
                     <a:solidFill>
                       <a:srgbClr val="000000"/>
                     </a:solidFill>
@@ -10648,7 +10648,7 @@
               </a:ln>
               <a:extLst>
                 <a:ext uri="{91240B29-F687-4f45-9708-019B960494DF}">
-                  <a14:hiddenLine xmlns:a14="http://schemas.microsoft.com/office/drawing/2010/main" xmlns="" w="9525">
+                  <a14:hiddenLine xmlns="" xmlns:a14="http://schemas.microsoft.com/office/drawing/2010/main" w="9525">
                     <a:solidFill>
                       <a:srgbClr val="000000"/>
                     </a:solidFill>
@@ -10713,7 +10713,7 @@
               </a:ln>
               <a:extLst>
                 <a:ext uri="{91240B29-F687-4f45-9708-019B960494DF}">
-                  <a14:hiddenLine xmlns:a14="http://schemas.microsoft.com/office/drawing/2010/main" xmlns="" w="9525">
+                  <a14:hiddenLine xmlns="" xmlns:a14="http://schemas.microsoft.com/office/drawing/2010/main" w="9525">
                     <a:solidFill>
                       <a:srgbClr val="000000"/>
                     </a:solidFill>
@@ -10803,7 +10803,7 @@
               </a:ln>
               <a:extLst>
                 <a:ext uri="{91240B29-F687-4f45-9708-019B960494DF}">
-                  <a14:hiddenLine xmlns:a14="http://schemas.microsoft.com/office/drawing/2010/main" xmlns="" w="9525">
+                  <a14:hiddenLine xmlns="" xmlns:a14="http://schemas.microsoft.com/office/drawing/2010/main" w="9525">
                     <a:solidFill>
                       <a:srgbClr val="000000"/>
                     </a:solidFill>
@@ -10865,7 +10865,7 @@
               </a:ln>
               <a:extLst>
                 <a:ext uri="{91240B29-F687-4f45-9708-019B960494DF}">
-                  <a14:hiddenLine xmlns:a14="http://schemas.microsoft.com/office/drawing/2010/main" xmlns="" w="9525">
+                  <a14:hiddenLine xmlns="" xmlns:a14="http://schemas.microsoft.com/office/drawing/2010/main" w="9525">
                     <a:solidFill>
                       <a:srgbClr val="000000"/>
                     </a:solidFill>
@@ -10955,7 +10955,7 @@
               </a:ln>
               <a:extLst>
                 <a:ext uri="{91240B29-F687-4f45-9708-019B960494DF}">
-                  <a14:hiddenLine xmlns:a14="http://schemas.microsoft.com/office/drawing/2010/main" xmlns="" w="9525">
+                  <a14:hiddenLine xmlns="" xmlns:a14="http://schemas.microsoft.com/office/drawing/2010/main" w="9525">
                     <a:solidFill>
                       <a:srgbClr val="000000"/>
                     </a:solidFill>
@@ -11020,7 +11020,7 @@
               </a:ln>
               <a:extLst>
                 <a:ext uri="{91240B29-F687-4f45-9708-019B960494DF}">
-                  <a14:hiddenLine xmlns:a14="http://schemas.microsoft.com/office/drawing/2010/main" xmlns="" w="9525">
+                  <a14:hiddenLine xmlns="" xmlns:a14="http://schemas.microsoft.com/office/drawing/2010/main" w="9525">
                     <a:solidFill>
                       <a:srgbClr val="000000"/>
                     </a:solidFill>
@@ -11082,7 +11082,7 @@
               </a:ln>
               <a:extLst>
                 <a:ext uri="{91240B29-F687-4f45-9708-019B960494DF}">
-                  <a14:hiddenLine xmlns:a14="http://schemas.microsoft.com/office/drawing/2010/main" xmlns="" w="9525">
+                  <a14:hiddenLine xmlns="" xmlns:a14="http://schemas.microsoft.com/office/drawing/2010/main" w="9525">
                     <a:solidFill>
                       <a:srgbClr val="000000"/>
                     </a:solidFill>
@@ -11172,7 +11172,7 @@
               </a:ln>
               <a:extLst>
                 <a:ext uri="{91240B29-F687-4f45-9708-019B960494DF}">
-                  <a14:hiddenLine xmlns:a14="http://schemas.microsoft.com/office/drawing/2010/main" xmlns="" w="9525">
+                  <a14:hiddenLine xmlns="" xmlns:a14="http://schemas.microsoft.com/office/drawing/2010/main" w="9525">
                     <a:solidFill>
                       <a:srgbClr val="000000"/>
                     </a:solidFill>
@@ -11262,7 +11262,7 @@
               </a:ln>
               <a:extLst>
                 <a:ext uri="{91240B29-F687-4f45-9708-019B960494DF}">
-                  <a14:hiddenLine xmlns:a14="http://schemas.microsoft.com/office/drawing/2010/main" xmlns="" w="9525">
+                  <a14:hiddenLine xmlns="" xmlns:a14="http://schemas.microsoft.com/office/drawing/2010/main" w="9525">
                     <a:solidFill>
                       <a:srgbClr val="000000"/>
                     </a:solidFill>
@@ -11327,7 +11327,7 @@
               </a:ln>
               <a:extLst>
                 <a:ext uri="{91240B29-F687-4f45-9708-019B960494DF}">
-                  <a14:hiddenLine xmlns:a14="http://schemas.microsoft.com/office/drawing/2010/main" xmlns="" w="9525">
+                  <a14:hiddenLine xmlns="" xmlns:a14="http://schemas.microsoft.com/office/drawing/2010/main" w="9525">
                     <a:solidFill>
                       <a:srgbClr val="000000"/>
                     </a:solidFill>
@@ -11447,7 +11447,7 @@
               </a:ln>
               <a:extLst>
                 <a:ext uri="{91240B29-F687-4f45-9708-019B960494DF}">
-                  <a14:hiddenLine xmlns:a14="http://schemas.microsoft.com/office/drawing/2010/main" xmlns="" w="9525">
+                  <a14:hiddenLine xmlns="" xmlns:a14="http://schemas.microsoft.com/office/drawing/2010/main" w="9525">
                     <a:solidFill>
                       <a:srgbClr val="000000"/>
                     </a:solidFill>
@@ -11528,7 +11528,7 @@
               </a:ln>
               <a:extLst>
                 <a:ext uri="{91240B29-F687-4f45-9708-019B960494DF}">
-                  <a14:hiddenLine xmlns:a14="http://schemas.microsoft.com/office/drawing/2010/main" xmlns="" w="9525">
+                  <a14:hiddenLine xmlns="" xmlns:a14="http://schemas.microsoft.com/office/drawing/2010/main" w="9525">
                     <a:solidFill>
                       <a:srgbClr val="000000"/>
                     </a:solidFill>
@@ -11643,7 +11643,7 @@
               </a:ln>
               <a:extLst>
                 <a:ext uri="{91240B29-F687-4f45-9708-019B960494DF}">
-                  <a14:hiddenLine xmlns:a14="http://schemas.microsoft.com/office/drawing/2010/main" xmlns="" w="9525">
+                  <a14:hiddenLine xmlns="" xmlns:a14="http://schemas.microsoft.com/office/drawing/2010/main" w="9525">
                     <a:solidFill>
                       <a:srgbClr val="000000"/>
                     </a:solidFill>
@@ -11733,7 +11733,7 @@
               </a:ln>
               <a:extLst>
                 <a:ext uri="{91240B29-F687-4f45-9708-019B960494DF}">
-                  <a14:hiddenLine xmlns:a14="http://schemas.microsoft.com/office/drawing/2010/main" xmlns="" w="9525">
+                  <a14:hiddenLine xmlns="" xmlns:a14="http://schemas.microsoft.com/office/drawing/2010/main" w="9525">
                     <a:solidFill>
                       <a:srgbClr val="000000"/>
                     </a:solidFill>
@@ -11798,7 +11798,7 @@
               </a:ln>
               <a:extLst>
                 <a:ext uri="{91240B29-F687-4f45-9708-019B960494DF}">
-                  <a14:hiddenLine xmlns:a14="http://schemas.microsoft.com/office/drawing/2010/main" xmlns="" w="9525">
+                  <a14:hiddenLine xmlns="" xmlns:a14="http://schemas.microsoft.com/office/drawing/2010/main" w="9525">
                     <a:solidFill>
                       <a:srgbClr val="000000"/>
                     </a:solidFill>
@@ -11888,7 +11888,7 @@
               </a:ln>
               <a:extLst>
                 <a:ext uri="{91240B29-F687-4f45-9708-019B960494DF}">
-                  <a14:hiddenLine xmlns:a14="http://schemas.microsoft.com/office/drawing/2010/main" xmlns="" w="9525">
+                  <a14:hiddenLine xmlns="" xmlns:a14="http://schemas.microsoft.com/office/drawing/2010/main" w="9525">
                     <a:solidFill>
                       <a:srgbClr val="000000"/>
                     </a:solidFill>
@@ -11956,7 +11956,7 @@
               </a:ln>
               <a:extLst>
                 <a:ext uri="{91240B29-F687-4f45-9708-019B960494DF}">
-                  <a14:hiddenLine xmlns:a14="http://schemas.microsoft.com/office/drawing/2010/main" xmlns="" w="9525">
+                  <a14:hiddenLine xmlns="" xmlns:a14="http://schemas.microsoft.com/office/drawing/2010/main" w="9525">
                     <a:solidFill>
                       <a:srgbClr val="000000"/>
                     </a:solidFill>
@@ -12046,7 +12046,7 @@
               </a:ln>
               <a:extLst>
                 <a:ext uri="{91240B29-F687-4f45-9708-019B960494DF}">
-                  <a14:hiddenLine xmlns:a14="http://schemas.microsoft.com/office/drawing/2010/main" xmlns="" w="9525">
+                  <a14:hiddenLine xmlns="" xmlns:a14="http://schemas.microsoft.com/office/drawing/2010/main" w="9525">
                     <a:solidFill>
                       <a:srgbClr val="000000"/>
                     </a:solidFill>
@@ -12114,7 +12114,7 @@
               </a:ln>
               <a:extLst>
                 <a:ext uri="{91240B29-F687-4f45-9708-019B960494DF}">
-                  <a14:hiddenLine xmlns:a14="http://schemas.microsoft.com/office/drawing/2010/main" xmlns="" w="9525">
+                  <a14:hiddenLine xmlns="" xmlns:a14="http://schemas.microsoft.com/office/drawing/2010/main" w="9525">
                     <a:solidFill>
                       <a:srgbClr val="000000"/>
                     </a:solidFill>
@@ -12204,7 +12204,7 @@
               </a:ln>
               <a:extLst>
                 <a:ext uri="{91240B29-F687-4f45-9708-019B960494DF}">
-                  <a14:hiddenLine xmlns:a14="http://schemas.microsoft.com/office/drawing/2010/main" xmlns="" w="9525">
+                  <a14:hiddenLine xmlns="" xmlns:a14="http://schemas.microsoft.com/office/drawing/2010/main" w="9525">
                     <a:solidFill>
                       <a:srgbClr val="000000"/>
                     </a:solidFill>
@@ -12238,7 +12238,7 @@
               </a:ln>
               <a:extLst>
                 <a:ext uri="{91240B29-F687-4f45-9708-019B960494DF}">
-                  <a14:hiddenLine xmlns:a14="http://schemas.microsoft.com/office/drawing/2010/main" xmlns="" w="9525">
+                  <a14:hiddenLine xmlns="" xmlns:a14="http://schemas.microsoft.com/office/drawing/2010/main" w="9525">
                     <a:solidFill>
                       <a:srgbClr val="000000"/>
                     </a:solidFill>
@@ -12843,7 +12843,7 @@
         <p:spPr/>
         <p:txBody>
           <a:bodyPr>
-            <a:normAutofit fontScale="92500" lnSpcReduction="20000"/>
+            <a:normAutofit fontScale="70000" lnSpcReduction="20000"/>
           </a:bodyPr>
           <a:lstStyle/>
           <a:p>
@@ -12875,6 +12875,18 @@
               <a:rPr lang="en-US" dirty="0"/>
               <a:t>04.09.2024</a:t>
             </a:r>
+            <a:br>
+              <a:rPr lang="en-US" dirty="0"/>
+            </a:br>
+            <a:r>
+              <a:rPr lang="en-US" dirty="0" err="1"/>
+              <a:t>GITHub</a:t>
+            </a:r>
+            <a:r>
+              <a:rPr lang="en-US"/>
+              <a:t> https://github.com/Flavius878/ProiectExamen_2024</a:t>
+            </a:r>
+            <a:endParaRPr lang="en-US" dirty="0"/>
           </a:p>
         </p:txBody>
       </p:sp>
